--- a/3_Data.pptx
+++ b/3_Data.pptx
@@ -5,12 +5,112 @@
     <p:sldMasterId id="2147483648" r:id="rId1"/>
   </p:sldMasterIdLst>
   <p:sldIdLst>
-    <p:sldId id="256" r:id="rId3"/>
-    <p:sldId id="257" r:id="rId4"/>
-    <p:sldId id="258" r:id="rId5"/>
+    <p:sldId id="256" r:id="rId2"/>
+    <p:sldId id="257" r:id="rId3"/>
+    <p:sldId id="258" r:id="rId4"/>
   </p:sldIdLst>
-  <p:sldSz cx="12192000" cy="6858000" type="custom"/>
+  <p:sldSz cx="12192000" cy="6858000"/>
   <p:notesSz cx="12192000" cy="6858000"/>
+  <p:defaultTextStyle>
+    <a:defPPr>
+      <a:defRPr lang="ru-BY"/>
+    </a:defPPr>
+    <a:lvl1pPr marL="0" algn="l" defTabSz="914400" rtl="0" eaLnBrk="1" latinLnBrk="0" hangingPunct="1">
+      <a:defRPr sz="1800" kern="1200">
+        <a:solidFill>
+          <a:schemeClr val="tx1"/>
+        </a:solidFill>
+        <a:latin typeface="+mn-lt"/>
+        <a:ea typeface="+mn-ea"/>
+        <a:cs typeface="+mn-cs"/>
+      </a:defRPr>
+    </a:lvl1pPr>
+    <a:lvl2pPr marL="457200" algn="l" defTabSz="914400" rtl="0" eaLnBrk="1" latinLnBrk="0" hangingPunct="1">
+      <a:defRPr sz="1800" kern="1200">
+        <a:solidFill>
+          <a:schemeClr val="tx1"/>
+        </a:solidFill>
+        <a:latin typeface="+mn-lt"/>
+        <a:ea typeface="+mn-ea"/>
+        <a:cs typeface="+mn-cs"/>
+      </a:defRPr>
+    </a:lvl2pPr>
+    <a:lvl3pPr marL="914400" algn="l" defTabSz="914400" rtl="0" eaLnBrk="1" latinLnBrk="0" hangingPunct="1">
+      <a:defRPr sz="1800" kern="1200">
+        <a:solidFill>
+          <a:schemeClr val="tx1"/>
+        </a:solidFill>
+        <a:latin typeface="+mn-lt"/>
+        <a:ea typeface="+mn-ea"/>
+        <a:cs typeface="+mn-cs"/>
+      </a:defRPr>
+    </a:lvl3pPr>
+    <a:lvl4pPr marL="1371600" algn="l" defTabSz="914400" rtl="0" eaLnBrk="1" latinLnBrk="0" hangingPunct="1">
+      <a:defRPr sz="1800" kern="1200">
+        <a:solidFill>
+          <a:schemeClr val="tx1"/>
+        </a:solidFill>
+        <a:latin typeface="+mn-lt"/>
+        <a:ea typeface="+mn-ea"/>
+        <a:cs typeface="+mn-cs"/>
+      </a:defRPr>
+    </a:lvl4pPr>
+    <a:lvl5pPr marL="1828800" algn="l" defTabSz="914400" rtl="0" eaLnBrk="1" latinLnBrk="0" hangingPunct="1">
+      <a:defRPr sz="1800" kern="1200">
+        <a:solidFill>
+          <a:schemeClr val="tx1"/>
+        </a:solidFill>
+        <a:latin typeface="+mn-lt"/>
+        <a:ea typeface="+mn-ea"/>
+        <a:cs typeface="+mn-cs"/>
+      </a:defRPr>
+    </a:lvl5pPr>
+    <a:lvl6pPr marL="2286000" algn="l" defTabSz="914400" rtl="0" eaLnBrk="1" latinLnBrk="0" hangingPunct="1">
+      <a:defRPr sz="1800" kern="1200">
+        <a:solidFill>
+          <a:schemeClr val="tx1"/>
+        </a:solidFill>
+        <a:latin typeface="+mn-lt"/>
+        <a:ea typeface="+mn-ea"/>
+        <a:cs typeface="+mn-cs"/>
+      </a:defRPr>
+    </a:lvl6pPr>
+    <a:lvl7pPr marL="2743200" algn="l" defTabSz="914400" rtl="0" eaLnBrk="1" latinLnBrk="0" hangingPunct="1">
+      <a:defRPr sz="1800" kern="1200">
+        <a:solidFill>
+          <a:schemeClr val="tx1"/>
+        </a:solidFill>
+        <a:latin typeface="+mn-lt"/>
+        <a:ea typeface="+mn-ea"/>
+        <a:cs typeface="+mn-cs"/>
+      </a:defRPr>
+    </a:lvl7pPr>
+    <a:lvl8pPr marL="3200400" algn="l" defTabSz="914400" rtl="0" eaLnBrk="1" latinLnBrk="0" hangingPunct="1">
+      <a:defRPr sz="1800" kern="1200">
+        <a:solidFill>
+          <a:schemeClr val="tx1"/>
+        </a:solidFill>
+        <a:latin typeface="+mn-lt"/>
+        <a:ea typeface="+mn-ea"/>
+        <a:cs typeface="+mn-cs"/>
+      </a:defRPr>
+    </a:lvl8pPr>
+    <a:lvl9pPr marL="3657600" algn="l" defTabSz="914400" rtl="0" eaLnBrk="1" latinLnBrk="0" hangingPunct="1">
+      <a:defRPr sz="1800" kern="1200">
+        <a:solidFill>
+          <a:schemeClr val="tx1"/>
+        </a:solidFill>
+        <a:latin typeface="+mn-lt"/>
+        <a:ea typeface="+mn-ea"/>
+        <a:cs typeface="+mn-cs"/>
+      </a:defRPr>
+    </a:lvl9pPr>
+  </p:defaultTextStyle>
+  <p:extLst>
+    <p:ext uri="{EFAFB233-063F-42B5-8137-9DF3F51BA10A}">
+      <p15:sldGuideLst xmlns:p15="http://schemas.microsoft.com/office/powerpoint/2012/main"/>
+    </p:ext>
+  </p:extLst>
 </p:presentation>
 </file>
 
@@ -23,7 +123,14 @@
         <p:cNvGrpSpPr/>
         <p:nvPr/>
       </p:nvGrpSpPr>
-      <p:grpSpPr/>
+      <p:grpSpPr>
+        <a:xfrm>
+          <a:off x="0" y="0"/>
+          <a:ext cx="0" cy="0"/>
+          <a:chOff x="0" y="0"/>
+          <a:chExt cx="0" cy="0"/>
+        </a:xfrm>
+      </p:grpSpPr>
     </p:spTree>
   </p:cSld>
   <p:clrMapOvr>
@@ -35,13 +142,25 @@
 <file path=ppt/slideMasters/slideMaster1.xml><?xml version="1.0" encoding="utf-8"?>
 <p:sldMaster xmlns:a="http://schemas.openxmlformats.org/drawingml/2006/main" xmlns:r="http://schemas.openxmlformats.org/officeDocument/2006/relationships" xmlns:p="http://schemas.openxmlformats.org/presentationml/2006/main">
   <p:cSld>
+    <p:bg>
+      <p:bgRef idx="1001">
+        <a:schemeClr val="bg1"/>
+      </p:bgRef>
+    </p:bg>
     <p:spTree>
       <p:nvGrpSpPr>
         <p:cNvPr id="1" name=""/>
         <p:cNvGrpSpPr/>
         <p:nvPr/>
       </p:nvGrpSpPr>
-      <p:grpSpPr/>
+      <p:grpSpPr>
+        <a:xfrm>
+          <a:off x="0" y="0"/>
+          <a:ext cx="0" cy="0"/>
+          <a:chOff x="0" y="0"/>
+          <a:chExt cx="0" cy="0"/>
+        </a:xfrm>
+      </p:grpSpPr>
     </p:spTree>
   </p:cSld>
   <p:clrMap bg1="lt1" tx1="dk1" bg2="lt2" tx2="dk2" accent1="accent1" accent2="accent2" accent3="accent3" accent4="accent4" accent5="accent5" accent6="accent6" hlink="hlink" folHlink="folHlink"/>
@@ -57,13 +176,14 @@
 </file>
 
 <file path=ppt/slides/slide1.xml><?xml version="1.0" encoding="utf-8"?>
-<p:sld xmlns:a="http://schemas.openxmlformats.org/drawingml/2006/main" xmlns:a14="http://schemas.microsoft.com/office/drawing/2010/main" xmlns:c="http://schemas.openxmlformats.org/drawingml/2006/chart" xmlns:cx="http://schemas.microsoft.com/office/drawing/2014/chartex" xmlns:m="http://schemas.openxmlformats.org/officeDocument/2006/math" xmlns:mc="http://schemas.openxmlformats.org/markup-compatibility/2006" xmlns:pptd="https://kimi-design.msh.team/pptd/2026" xmlns:r="http://schemas.openxmlformats.org/officeDocument/2006/relationships" xmlns:p="http://schemas.openxmlformats.org/presentationml/2006/main">
+<p:sld xmlns:a="http://schemas.openxmlformats.org/drawingml/2006/main" xmlns:r="http://schemas.openxmlformats.org/officeDocument/2006/relationships" xmlns:p="http://schemas.openxmlformats.org/presentationml/2006/main">
   <p:cSld>
     <p:bg>
       <p:bgPr>
         <a:solidFill>
           <a:srgbClr val="FFFFFF"/>
         </a:solidFill>
+        <a:effectLst/>
       </p:bgPr>
     </p:bg>
     <p:spTree>
@@ -100,7 +220,7 @@
           </a:ln>
         </p:spPr>
         <p:txBody>
-          <a:bodyPr lIns="0" rIns="0" tIns="0" bIns="0" wrap="none" rtlCol="0"/>
+          <a:bodyPr wrap="none" lIns="0" tIns="0" rIns="0" bIns="0" rtlCol="0"/>
           <a:lstStyle/>
           <a:p>
             <a:pPr>
@@ -109,7 +229,7 @@
               </a:lnSpc>
             </a:pPr>
             <a:r>
-              <a:rPr lang="en-US" sz="1000" noProof="1" b="1" spc="140" kern="0">
+              <a:rPr lang="en-US" sz="1000" b="1" kern="0" spc="140" noProof="1">
                 <a:solidFill>
                   <a:srgbClr val="0B5D5E"/>
                 </a:solidFill>
@@ -142,7 +262,7 @@
           </a:ln>
         </p:spPr>
         <p:txBody>
-          <a:bodyPr lIns="0" rIns="0" tIns="0" bIns="0" wrap="none" rtlCol="0" anchor="t"/>
+          <a:bodyPr wrap="none" lIns="0" tIns="0" rIns="0" bIns="0" rtlCol="0" anchor="t"/>
           <a:lstStyle/>
           <a:p>
             <a:pPr algn="r">
@@ -184,7 +304,7 @@
           </a:ln>
         </p:spPr>
         <p:txBody>
-          <a:bodyPr lIns="0" rIns="0" tIns="0" bIns="0" wrap="square" rtlCol="0"/>
+          <a:bodyPr wrap="square" lIns="0" tIns="0" rIns="0" bIns="0" rtlCol="0"/>
           <a:lstStyle/>
           <a:p>
             <a:pPr>
@@ -193,7 +313,7 @@
               </a:lnSpc>
             </a:pPr>
             <a:r>
-              <a:rPr lang="en-US" sz="2800" noProof="1" b="1">
+              <a:rPr lang="en-US" sz="2800" b="1" noProof="1">
                 <a:solidFill>
                   <a:srgbClr val="172526"/>
                 </a:solidFill>
@@ -249,7 +369,7 @@
           </a:ln>
         </p:spPr>
         <p:txBody>
-          <a:bodyPr lIns="0" rIns="0" tIns="0" bIns="0" wrap="none" rtlCol="0"/>
+          <a:bodyPr wrap="none" lIns="0" tIns="0" rIns="0" bIns="0" rtlCol="0"/>
           <a:lstStyle/>
           <a:p>
             <a:pPr>
@@ -258,7 +378,7 @@
               </a:lnSpc>
             </a:pPr>
             <a:r>
-              <a:rPr lang="en-US" sz="2500" noProof="1" b="1">
+              <a:rPr lang="en-US" sz="2500" b="1" noProof="1">
                 <a:solidFill>
                   <a:srgbClr val="083F40"/>
                 </a:solidFill>
@@ -291,7 +411,7 @@
           </a:ln>
         </p:spPr>
         <p:txBody>
-          <a:bodyPr lIns="0" rIns="0" tIns="0" bIns="0" wrap="none" rtlCol="0"/>
+          <a:bodyPr wrap="none" lIns="0" tIns="0" rIns="0" bIns="0" rtlCol="0"/>
           <a:lstStyle/>
           <a:p>
             <a:pPr>
@@ -320,7 +440,7 @@
           <p:nvPr>
             <p:extLst>
               <p:ext uri="{F5677B7D-0D2A-4D9B-9A5C-6D8D7D0E5A5D}">
-                <pptd:line encoding="base64url">eyJ2aWV3Qm94IjpbMSw0N10sInBvaW50cyI6IjAsMCAwLDQ3In0</pptd:line>
+                <pptd:line xmlns:pptd="https://kimi-design.msh.team/pptd/2026" xmlns:mc="http://schemas.openxmlformats.org/markup-compatibility/2006" xmlns:m="http://schemas.openxmlformats.org/officeDocument/2006/math" xmlns:cx="http://schemas.microsoft.com/office/drawing/2014/chartex" xmlns:c="http://schemas.openxmlformats.org/drawingml/2006/chart" xmlns:a14="http://schemas.microsoft.com/office/drawing/2010/main" xmlns="" encoding="base64url">eyJ2aWV3Qm94IjpbMSw0N10sInBvaW50cyI6IjAsMCAwLDQ3In0</pptd:line>
               </p:ext>
             </p:extLst>
           </p:nvPr>
@@ -376,7 +496,7 @@
           </a:ln>
         </p:spPr>
         <p:txBody>
-          <a:bodyPr lIns="0" rIns="0" tIns="0" bIns="0" wrap="none" rtlCol="0"/>
+          <a:bodyPr wrap="none" lIns="0" tIns="0" rIns="0" bIns="0" rtlCol="0"/>
           <a:lstStyle/>
           <a:p>
             <a:pPr>
@@ -385,7 +505,7 @@
               </a:lnSpc>
             </a:pPr>
             <a:r>
-              <a:rPr lang="en-US" sz="2500" noProof="1" b="1">
+              <a:rPr lang="en-US" sz="2500" b="1" noProof="1">
                 <a:solidFill>
                   <a:srgbClr val="083F40"/>
                 </a:solidFill>
@@ -418,7 +538,7 @@
           </a:ln>
         </p:spPr>
         <p:txBody>
-          <a:bodyPr lIns="0" rIns="0" tIns="0" bIns="0" wrap="none" rtlCol="0"/>
+          <a:bodyPr wrap="none" lIns="0" tIns="0" rIns="0" bIns="0" rtlCol="0"/>
           <a:lstStyle/>
           <a:p>
             <a:pPr>
@@ -447,7 +567,7 @@
           <p:nvPr>
             <p:extLst>
               <p:ext uri="{F5677B7D-0D2A-4D9B-9A5C-6D8D7D0E5A5D}">
-                <pptd:line encoding="base64url">eyJ2aWV3Qm94IjpbMSw0N10sInBvaW50cyI6IjAsMCAwLDQ3In0</pptd:line>
+                <pptd:line xmlns:pptd="https://kimi-design.msh.team/pptd/2026" xmlns:mc="http://schemas.openxmlformats.org/markup-compatibility/2006" xmlns:m="http://schemas.openxmlformats.org/officeDocument/2006/math" xmlns:cx="http://schemas.microsoft.com/office/drawing/2014/chartex" xmlns:c="http://schemas.openxmlformats.org/drawingml/2006/chart" xmlns:a14="http://schemas.microsoft.com/office/drawing/2010/main" xmlns="" encoding="base64url">eyJ2aWV3Qm94IjpbMSw0N10sInBvaW50cyI6IjAsMCAwLDQ3In0</pptd:line>
               </p:ext>
             </p:extLst>
           </p:nvPr>
@@ -503,7 +623,7 @@
           </a:ln>
         </p:spPr>
         <p:txBody>
-          <a:bodyPr lIns="0" rIns="0" tIns="0" bIns="0" wrap="none" rtlCol="0"/>
+          <a:bodyPr wrap="none" lIns="0" tIns="0" rIns="0" bIns="0" rtlCol="0"/>
           <a:lstStyle/>
           <a:p>
             <a:pPr>
@@ -512,7 +632,7 @@
               </a:lnSpc>
             </a:pPr>
             <a:r>
-              <a:rPr lang="en-US" sz="2500" noProof="1" b="1">
+              <a:rPr lang="en-US" sz="2500" b="1" noProof="1">
                 <a:solidFill>
                   <a:srgbClr val="083F40"/>
                 </a:solidFill>
@@ -545,7 +665,7 @@
           </a:ln>
         </p:spPr>
         <p:txBody>
-          <a:bodyPr lIns="0" rIns="0" tIns="0" bIns="0" wrap="none" rtlCol="0"/>
+          <a:bodyPr wrap="none" lIns="0" tIns="0" rIns="0" bIns="0" rtlCol="0"/>
           <a:lstStyle/>
           <a:p>
             <a:pPr>
@@ -574,7 +694,7 @@
           <p:nvPr>
             <p:extLst>
               <p:ext uri="{F5677B7D-0D2A-4D9B-9A5C-6D8D7D0E5A5D}">
-                <pptd:line encoding="base64url">eyJ2aWV3Qm94IjpbMSw0N10sInBvaW50cyI6IjAsMCAwLDQ3In0</pptd:line>
+                <pptd:line xmlns:pptd="https://kimi-design.msh.team/pptd/2026" xmlns:mc="http://schemas.openxmlformats.org/markup-compatibility/2006" xmlns:m="http://schemas.openxmlformats.org/officeDocument/2006/math" xmlns:cx="http://schemas.microsoft.com/office/drawing/2014/chartex" xmlns:c="http://schemas.openxmlformats.org/drawingml/2006/chart" xmlns:a14="http://schemas.microsoft.com/office/drawing/2010/main" xmlns="" encoding="base64url">eyJ2aWV3Qm94IjpbMSw0N10sInBvaW50cyI6IjAsMCAwLDQ3In0</pptd:line>
               </p:ext>
             </p:extLst>
           </p:nvPr>
@@ -630,7 +750,7 @@
           </a:ln>
         </p:spPr>
         <p:txBody>
-          <a:bodyPr lIns="0" rIns="0" tIns="0" bIns="0" wrap="none" rtlCol="0"/>
+          <a:bodyPr wrap="none" lIns="0" tIns="0" rIns="0" bIns="0" rtlCol="0"/>
           <a:lstStyle/>
           <a:p>
             <a:pPr>
@@ -639,7 +759,7 @@
               </a:lnSpc>
             </a:pPr>
             <a:r>
-              <a:rPr lang="en-US" sz="2500" noProof="1" b="1">
+              <a:rPr lang="en-US" sz="2500" b="1" noProof="1">
                 <a:solidFill>
                   <a:srgbClr val="083F40"/>
                 </a:solidFill>
@@ -672,7 +792,7 @@
           </a:ln>
         </p:spPr>
         <p:txBody>
-          <a:bodyPr lIns="0" rIns="0" tIns="0" bIns="0" wrap="none" rtlCol="0"/>
+          <a:bodyPr wrap="none" lIns="0" tIns="0" rIns="0" bIns="0" rtlCol="0"/>
           <a:lstStyle/>
           <a:p>
             <a:pPr>
@@ -714,7 +834,7 @@
           </a:ln>
         </p:spPr>
         <p:txBody>
-          <a:bodyPr lIns="0" rIns="0" tIns="0" bIns="0" wrap="none" rtlCol="0"/>
+          <a:bodyPr wrap="none" lIns="0" tIns="0" rIns="0" bIns="0" rtlCol="0"/>
           <a:lstStyle/>
           <a:p>
             <a:pPr>
@@ -723,7 +843,7 @@
               </a:lnSpc>
             </a:pPr>
             <a:r>
-              <a:rPr lang="en-US" sz="1000" noProof="1" b="1" spc="120" kern="0">
+              <a:rPr lang="en-US" sz="1000" b="1" kern="0" spc="120" noProof="1">
                 <a:solidFill>
                   <a:srgbClr val="657475"/>
                 </a:solidFill>
@@ -743,7 +863,7 @@
           <p:nvPr>
             <p:extLst>
               <p:ext uri="{F5677B7D-0D2A-4D9B-9A5C-6D8D7D0E5A5D}">
-                <pptd:icon encoding="base64url">eyJpY29uTmFtZSI6ImZhczpjYW1lcmEifQ</pptd:icon>
+                <pptd:icon xmlns:pptd="https://kimi-design.msh.team/pptd/2026" xmlns:mc="http://schemas.openxmlformats.org/markup-compatibility/2006" xmlns:m="http://schemas.openxmlformats.org/officeDocument/2006/math" xmlns:cx="http://schemas.microsoft.com/office/drawing/2014/chartex" xmlns:c="http://schemas.openxmlformats.org/drawingml/2006/chart" xmlns:a14="http://schemas.microsoft.com/office/drawing/2010/main" xmlns="" encoding="base64url">eyJpY29uTmFtZSI6ImZhczpjYW1lcmEifQ</pptd:icon>
               </p:ext>
             </p:extLst>
           </p:nvPr>
@@ -874,7 +994,7 @@
           </a:ln>
         </p:spPr>
         <p:txBody>
-          <a:bodyPr lIns="0" rIns="0" tIns="0" bIns="0" wrap="none" rtlCol="0"/>
+          <a:bodyPr wrap="none" lIns="0" tIns="0" rIns="0" bIns="0" rtlCol="0"/>
           <a:lstStyle/>
           <a:p>
             <a:pPr>
@@ -883,7 +1003,7 @@
               </a:lnSpc>
             </a:pPr>
             <a:r>
-              <a:rPr lang="en-US" sz="1400" noProof="1" b="1">
+              <a:rPr lang="en-US" sz="1400" b="1" noProof="1">
                 <a:solidFill>
                   <a:srgbClr val="172526"/>
                 </a:solidFill>
@@ -916,7 +1036,7 @@
           </a:ln>
         </p:spPr>
         <p:txBody>
-          <a:bodyPr lIns="0" rIns="0" tIns="0" bIns="0" wrap="square" rtlCol="0"/>
+          <a:bodyPr wrap="square" lIns="0" tIns="0" rIns="0" bIns="0" rtlCol="0"/>
           <a:lstStyle/>
           <a:p>
             <a:pPr>
@@ -945,7 +1065,7 @@
           <p:nvPr>
             <p:extLst>
               <p:ext uri="{F5677B7D-0D2A-4D9B-9A5C-6D8D7D0E5A5D}">
-                <pptd:line encoding="base64url">eyJ2aWV3Qm94IjpbNDIsMV0sInBvaW50cyI6IjAsMCA0MiwwIn0</pptd:line>
+                <pptd:line xmlns:pptd="https://kimi-design.msh.team/pptd/2026" xmlns:mc="http://schemas.openxmlformats.org/markup-compatibility/2006" xmlns:m="http://schemas.openxmlformats.org/officeDocument/2006/math" xmlns:cx="http://schemas.microsoft.com/office/drawing/2014/chartex" xmlns:c="http://schemas.openxmlformats.org/drawingml/2006/chart" xmlns:a14="http://schemas.microsoft.com/office/drawing/2010/main" xmlns="" encoding="base64url">eyJ2aWV3Qm94IjpbNDIsMV0sInBvaW50cyI6IjAsMCA0MiwwIn0</pptd:line>
               </p:ext>
             </p:extLst>
           </p:nvPr>
@@ -989,7 +1109,7 @@
           <p:nvPr>
             <p:extLst>
               <p:ext uri="{F5677B7D-0D2A-4D9B-9A5C-6D8D7D0E5A5D}">
-                <pptd:icon encoding="base64url">eyJpY29uTmFtZSI6ImZhczptaWNyb2NoaXAifQ</pptd:icon>
+                <pptd:icon xmlns:pptd="https://kimi-design.msh.team/pptd/2026" xmlns:mc="http://schemas.openxmlformats.org/markup-compatibility/2006" xmlns:m="http://schemas.openxmlformats.org/officeDocument/2006/math" xmlns:cx="http://schemas.microsoft.com/office/drawing/2014/chartex" xmlns:c="http://schemas.openxmlformats.org/drawingml/2006/chart" xmlns:a14="http://schemas.microsoft.com/office/drawing/2010/main" xmlns="" encoding="base64url">eyJpY29uTmFtZSI6ImZhczptaWNyb2NoaXAifQ</pptd:icon>
               </p:ext>
             </p:extLst>
           </p:nvPr>
@@ -1332,7 +1452,7 @@
           </a:ln>
         </p:spPr>
         <p:txBody>
-          <a:bodyPr lIns="0" rIns="0" tIns="0" bIns="0" wrap="none" rtlCol="0"/>
+          <a:bodyPr wrap="none" lIns="0" tIns="0" rIns="0" bIns="0" rtlCol="0"/>
           <a:lstStyle/>
           <a:p>
             <a:pPr>
@@ -1341,7 +1461,7 @@
               </a:lnSpc>
             </a:pPr>
             <a:r>
-              <a:rPr lang="en-US" sz="1400" noProof="1" b="1">
+              <a:rPr lang="en-US" sz="1400" b="1" noProof="1">
                 <a:solidFill>
                   <a:srgbClr val="172526"/>
                 </a:solidFill>
@@ -1374,7 +1494,7 @@
           </a:ln>
         </p:spPr>
         <p:txBody>
-          <a:bodyPr lIns="0" rIns="0" tIns="0" bIns="0" wrap="square" rtlCol="0"/>
+          <a:bodyPr wrap="square" lIns="0" tIns="0" rIns="0" bIns="0" rtlCol="0"/>
           <a:lstStyle/>
           <a:p>
             <a:pPr>
@@ -1403,7 +1523,7 @@
           <p:nvPr>
             <p:extLst>
               <p:ext uri="{F5677B7D-0D2A-4D9B-9A5C-6D8D7D0E5A5D}">
-                <pptd:line encoding="base64url">eyJ2aWV3Qm94IjpbNDIsMV0sInBvaW50cyI6IjAsMCA0MiwwIn0</pptd:line>
+                <pptd:line xmlns:pptd="https://kimi-design.msh.team/pptd/2026" xmlns:mc="http://schemas.openxmlformats.org/markup-compatibility/2006" xmlns:m="http://schemas.openxmlformats.org/officeDocument/2006/math" xmlns:cx="http://schemas.microsoft.com/office/drawing/2014/chartex" xmlns:c="http://schemas.openxmlformats.org/drawingml/2006/chart" xmlns:a14="http://schemas.microsoft.com/office/drawing/2010/main" xmlns="" encoding="base64url">eyJ2aWV3Qm94IjpbNDIsMV0sInBvaW50cyI6IjAsMCA0MiwwIn0</pptd:line>
               </p:ext>
             </p:extLst>
           </p:nvPr>
@@ -1447,7 +1567,7 @@
           <p:nvPr>
             <p:extLst>
               <p:ext uri="{F5677B7D-0D2A-4D9B-9A5C-6D8D7D0E5A5D}">
-                <pptd:icon encoding="base64url">eyJpY29uTmFtZSI6ImZhczpnZWFycyJ9</pptd:icon>
+                <pptd:icon xmlns:pptd="https://kimi-design.msh.team/pptd/2026" xmlns:mc="http://schemas.openxmlformats.org/markup-compatibility/2006" xmlns:m="http://schemas.openxmlformats.org/officeDocument/2006/math" xmlns:cx="http://schemas.microsoft.com/office/drawing/2014/chartex" xmlns:c="http://schemas.openxmlformats.org/drawingml/2006/chart" xmlns:a14="http://schemas.microsoft.com/office/drawing/2010/main" xmlns="" encoding="base64url">eyJpY29uTmFtZSI6ImZhczpnZWFycyJ9</pptd:icon>
               </p:ext>
             </p:extLst>
           </p:nvPr>
@@ -1862,7 +1982,7 @@
           </a:ln>
         </p:spPr>
         <p:txBody>
-          <a:bodyPr lIns="0" rIns="0" tIns="0" bIns="0" wrap="none" rtlCol="0"/>
+          <a:bodyPr wrap="none" lIns="0" tIns="0" rIns="0" bIns="0" rtlCol="0"/>
           <a:lstStyle/>
           <a:p>
             <a:pPr>
@@ -1871,7 +1991,7 @@
               </a:lnSpc>
             </a:pPr>
             <a:r>
-              <a:rPr lang="en-US" sz="1400" noProof="1" b="1">
+              <a:rPr lang="en-US" sz="1400" b="1" noProof="1">
                 <a:solidFill>
                   <a:srgbClr val="172526"/>
                 </a:solidFill>
@@ -1904,7 +2024,7 @@
           </a:ln>
         </p:spPr>
         <p:txBody>
-          <a:bodyPr lIns="0" rIns="0" tIns="0" bIns="0" wrap="square" rtlCol="0"/>
+          <a:bodyPr wrap="square" lIns="0" tIns="0" rIns="0" bIns="0" rtlCol="0"/>
           <a:lstStyle/>
           <a:p>
             <a:pPr>
@@ -1933,7 +2053,7 @@
           <p:nvPr>
             <p:extLst>
               <p:ext uri="{F5677B7D-0D2A-4D9B-9A5C-6D8D7D0E5A5D}">
-                <pptd:line encoding="base64url">eyJ2aWV3Qm94IjpbNDIsMV0sInBvaW50cyI6IjAsMCA0MiwwIn0</pptd:line>
+                <pptd:line xmlns:pptd="https://kimi-design.msh.team/pptd/2026" xmlns:mc="http://schemas.openxmlformats.org/markup-compatibility/2006" xmlns:m="http://schemas.openxmlformats.org/officeDocument/2006/math" xmlns:cx="http://schemas.microsoft.com/office/drawing/2014/chartex" xmlns:c="http://schemas.openxmlformats.org/drawingml/2006/chart" xmlns:a14="http://schemas.microsoft.com/office/drawing/2010/main" xmlns="" encoding="base64url">eyJ2aWV3Qm94IjpbNDIsMV0sInBvaW50cyI6IjAsMCA0MiwwIn0</pptd:line>
               </p:ext>
             </p:extLst>
           </p:nvPr>
@@ -1977,7 +2097,7 @@
           <p:nvPr>
             <p:extLst>
               <p:ext uri="{F5677B7D-0D2A-4D9B-9A5C-6D8D7D0E5A5D}">
-                <pptd:icon encoding="base64url">eyJpY29uTmFtZSI6ImZhczpjaXJjbGUtY2hlY2sifQ</pptd:icon>
+                <pptd:icon xmlns:pptd="https://kimi-design.msh.team/pptd/2026" xmlns:mc="http://schemas.openxmlformats.org/markup-compatibility/2006" xmlns:m="http://schemas.openxmlformats.org/officeDocument/2006/math" xmlns:cx="http://schemas.microsoft.com/office/drawing/2014/chartex" xmlns:c="http://schemas.openxmlformats.org/drawingml/2006/chart" xmlns:a14="http://schemas.microsoft.com/office/drawing/2010/main" xmlns="" encoding="base64url">eyJpY29uTmFtZSI6ImZhczpjaXJjbGUtY2hlY2sifQ</pptd:icon>
               </p:ext>
             </p:extLst>
           </p:nvPr>
@@ -2096,7 +2216,7 @@
           </a:ln>
         </p:spPr>
         <p:txBody>
-          <a:bodyPr lIns="0" rIns="0" tIns="0" bIns="0" wrap="none" rtlCol="0"/>
+          <a:bodyPr wrap="none" lIns="0" tIns="0" rIns="0" bIns="0" rtlCol="0"/>
           <a:lstStyle/>
           <a:p>
             <a:pPr>
@@ -2105,7 +2225,7 @@
               </a:lnSpc>
             </a:pPr>
             <a:r>
-              <a:rPr lang="en-US" sz="1400" noProof="1" b="1">
+              <a:rPr lang="en-US" sz="1400" b="1" noProof="1">
                 <a:solidFill>
                   <a:srgbClr val="172526"/>
                 </a:solidFill>
@@ -2138,7 +2258,7 @@
           </a:ln>
         </p:spPr>
         <p:txBody>
-          <a:bodyPr lIns="0" rIns="0" tIns="0" bIns="0" wrap="square" rtlCol="0"/>
+          <a:bodyPr wrap="square" lIns="0" tIns="0" rIns="0" bIns="0" rtlCol="0"/>
           <a:lstStyle/>
           <a:p>
             <a:pPr>
@@ -2167,7 +2287,7 @@
           <p:nvPr>
             <p:extLst>
               <p:ext uri="{F5677B7D-0D2A-4D9B-9A5C-6D8D7D0E5A5D}">
-                <pptd:line encoding="base64url">eyJ2aWV3Qm94IjpbNDIsMV0sInBvaW50cyI6IjAsMCA0MiwwIn0</pptd:line>
+                <pptd:line xmlns:pptd="https://kimi-design.msh.team/pptd/2026" xmlns:mc="http://schemas.openxmlformats.org/markup-compatibility/2006" xmlns:m="http://schemas.openxmlformats.org/officeDocument/2006/math" xmlns:cx="http://schemas.microsoft.com/office/drawing/2014/chartex" xmlns:c="http://schemas.openxmlformats.org/drawingml/2006/chart" xmlns:a14="http://schemas.microsoft.com/office/drawing/2010/main" xmlns="" encoding="base64url">eyJ2aWV3Qm94IjpbNDIsMV0sInBvaW50cyI6IjAsMCA0MiwwIn0</pptd:line>
               </p:ext>
             </p:extLst>
           </p:nvPr>
@@ -2211,7 +2331,7 @@
           <p:nvPr>
             <p:extLst>
               <p:ext uri="{F5677B7D-0D2A-4D9B-9A5C-6D8D7D0E5A5D}">
-                <pptd:icon encoding="base64url">eyJpY29uTmFtZSI6ImZhczpkYXRhYmFzZSJ9</pptd:icon>
+                <pptd:icon xmlns:pptd="https://kimi-design.msh.team/pptd/2026" xmlns:mc="http://schemas.openxmlformats.org/markup-compatibility/2006" xmlns:m="http://schemas.openxmlformats.org/officeDocument/2006/math" xmlns:cx="http://schemas.microsoft.com/office/drawing/2014/chartex" xmlns:c="http://schemas.openxmlformats.org/drawingml/2006/chart" xmlns:a14="http://schemas.microsoft.com/office/drawing/2010/main" xmlns="" encoding="base64url">eyJpY29uTmFtZSI6ImZhczpkYXRhYmFzZSJ9</pptd:icon>
               </p:ext>
             </p:extLst>
           </p:nvPr>
@@ -2374,7 +2494,7 @@
           </a:ln>
         </p:spPr>
         <p:txBody>
-          <a:bodyPr lIns="0" rIns="0" tIns="0" bIns="0" wrap="none" rtlCol="0"/>
+          <a:bodyPr wrap="none" lIns="0" tIns="0" rIns="0" bIns="0" rtlCol="0"/>
           <a:lstStyle/>
           <a:p>
             <a:pPr>
@@ -2383,7 +2503,7 @@
               </a:lnSpc>
             </a:pPr>
             <a:r>
-              <a:rPr lang="en-US" sz="1400" noProof="1" b="1">
+              <a:rPr lang="en-US" sz="1400" b="1" noProof="1">
                 <a:solidFill>
                   <a:srgbClr val="172526"/>
                 </a:solidFill>
@@ -2416,7 +2536,7 @@
           </a:ln>
         </p:spPr>
         <p:txBody>
-          <a:bodyPr lIns="0" rIns="0" tIns="0" bIns="0" wrap="square" rtlCol="0"/>
+          <a:bodyPr wrap="square" lIns="0" tIns="0" rIns="0" bIns="0" rtlCol="0"/>
           <a:lstStyle/>
           <a:p>
             <a:pPr>
@@ -2458,7 +2578,7 @@
           </a:ln>
         </p:spPr>
         <p:txBody>
-          <a:bodyPr lIns="0" rIns="0" tIns="0" bIns="0" wrap="none" rtlCol="0"/>
+          <a:bodyPr wrap="none" lIns="0" tIns="0" rIns="0" bIns="0" rtlCol="0"/>
           <a:lstStyle/>
           <a:p>
             <a:pPr>
@@ -2467,7 +2587,7 @@
               </a:lnSpc>
             </a:pPr>
             <a:r>
-              <a:rPr lang="en-US" sz="1000" noProof="1" b="1" spc="120" kern="0">
+              <a:rPr lang="en-US" sz="1000" b="1" kern="0" spc="120" noProof="1">
                 <a:solidFill>
                   <a:srgbClr val="657475"/>
                 </a:solidFill>
@@ -2500,7 +2620,7 @@
           </a:ln>
         </p:spPr>
         <p:txBody>
-          <a:bodyPr lIns="0" rIns="0" tIns="0" bIns="0" wrap="square" rtlCol="0"/>
+          <a:bodyPr wrap="square" lIns="0" tIns="0" rIns="0" bIns="0" rtlCol="0"/>
           <a:lstStyle/>
           <a:p>
             <a:pPr>
@@ -2509,7 +2629,7 @@
               </a:lnSpc>
             </a:pPr>
             <a:r>
-              <a:rPr lang="en-US" sz="1200" noProof="1" b="1">
+              <a:rPr lang="en-US" sz="1200" b="1" noProof="1">
                 <a:solidFill>
                   <a:srgbClr val="172526"/>
                 </a:solidFill>
@@ -2537,7 +2657,7 @@
               </a:lnSpc>
             </a:pPr>
             <a:r>
-              <a:rPr lang="en-US" sz="1200" noProof="1" b="1">
+              <a:rPr lang="en-US" sz="1200" b="1" noProof="1">
                 <a:solidFill>
                   <a:srgbClr val="172526"/>
                 </a:solidFill>
@@ -2602,7 +2722,7 @@
           </a:ln>
         </p:spPr>
         <p:txBody>
-          <a:bodyPr lIns="0" rIns="0" tIns="0" bIns="0" wrap="none" rtlCol="0" anchor="t"/>
+          <a:bodyPr wrap="none" lIns="0" tIns="0" rIns="0" bIns="0" rtlCol="0" anchor="t"/>
           <a:lstStyle/>
           <a:p>
             <a:pPr algn="ctr">
@@ -2611,14 +2731,14 @@
               </a:lnSpc>
             </a:pPr>
             <a:r>
-              <a:rPr lang="en-US" sz="1100" noProof="1" b="1">
+              <a:rPr lang="en-US" sz="1100" b="1" noProof="1">
                 <a:solidFill>
                   <a:srgbClr val="083F40"/>
                 </a:solidFill>
                 <a:latin typeface="Arial"/>
                 <a:ea typeface="Arial"/>
               </a:rPr>
-              <a:t>Вторая камера — только если стендовый тест покажет, что одна не видит всю крышку или часть дефектов</a:t>
+              <a:t>Вторая камера - только если стендовый тест покажет, что одна не видит всю крышку или часть дефектов</a:t>
             </a:r>
             <a:endParaRPr lang="en-US" sz="1100" noProof="1"/>
           </a:p>
@@ -2644,7 +2764,7 @@
           </a:ln>
         </p:spPr>
         <p:txBody>
-          <a:bodyPr lIns="0" rIns="0" tIns="0" bIns="0" wrap="none" rtlCol="0"/>
+          <a:bodyPr wrap="none" lIns="0" tIns="0" rIns="0" bIns="0" rtlCol="0"/>
           <a:lstStyle/>
           <a:p>
             <a:pPr>
@@ -2686,7 +2806,7 @@
           </a:ln>
         </p:spPr>
         <p:txBody>
-          <a:bodyPr lIns="0" rIns="0" tIns="0" bIns="0" wrap="none" rtlCol="0" anchor="t"/>
+          <a:bodyPr wrap="none" lIns="0" tIns="0" rIns="0" bIns="0" rtlCol="0" anchor="t"/>
           <a:lstStyle/>
           <a:p>
             <a:pPr algn="r">
@@ -2717,13 +2837,14 @@
 </file>
 
 <file path=ppt/slides/slide2.xml><?xml version="1.0" encoding="utf-8"?>
-<p:sld xmlns:a="http://schemas.openxmlformats.org/drawingml/2006/main" xmlns:a14="http://schemas.microsoft.com/office/drawing/2010/main" xmlns:c="http://schemas.openxmlformats.org/drawingml/2006/chart" xmlns:cx="http://schemas.microsoft.com/office/drawing/2014/chartex" xmlns:m="http://schemas.openxmlformats.org/officeDocument/2006/math" xmlns:mc="http://schemas.openxmlformats.org/markup-compatibility/2006" xmlns:pptd="https://kimi-design.msh.team/pptd/2026" xmlns:r="http://schemas.openxmlformats.org/officeDocument/2006/relationships" xmlns:p="http://schemas.openxmlformats.org/presentationml/2006/main">
+<p:sld xmlns:a="http://schemas.openxmlformats.org/drawingml/2006/main" xmlns:r="http://schemas.openxmlformats.org/officeDocument/2006/relationships" xmlns:p="http://schemas.openxmlformats.org/presentationml/2006/main">
   <p:cSld>
     <p:bg>
       <p:bgPr>
         <a:solidFill>
           <a:srgbClr val="FFFFFF"/>
         </a:solidFill>
+        <a:effectLst/>
       </p:bgPr>
     </p:bg>
     <p:spTree>
@@ -2760,7 +2881,7 @@
           </a:ln>
         </p:spPr>
         <p:txBody>
-          <a:bodyPr lIns="0" rIns="0" tIns="0" bIns="0" wrap="none" rtlCol="0"/>
+          <a:bodyPr wrap="none" lIns="0" tIns="0" rIns="0" bIns="0" rtlCol="0"/>
           <a:lstStyle/>
           <a:p>
             <a:pPr>
@@ -2769,7 +2890,7 @@
               </a:lnSpc>
             </a:pPr>
             <a:r>
-              <a:rPr lang="en-US" sz="1000" noProof="1" b="1" spc="140" kern="0">
+              <a:rPr lang="en-US" sz="1000" b="1" kern="0" spc="140" noProof="1">
                 <a:solidFill>
                   <a:srgbClr val="0B5D5E"/>
                 </a:solidFill>
@@ -2802,7 +2923,7 @@
           </a:ln>
         </p:spPr>
         <p:txBody>
-          <a:bodyPr lIns="0" rIns="0" tIns="0" bIns="0" wrap="none" rtlCol="0" anchor="t"/>
+          <a:bodyPr wrap="none" lIns="0" tIns="0" rIns="0" bIns="0" rtlCol="0" anchor="t"/>
           <a:lstStyle/>
           <a:p>
             <a:pPr algn="r">
@@ -2844,7 +2965,7 @@
           </a:ln>
         </p:spPr>
         <p:txBody>
-          <a:bodyPr lIns="0" rIns="0" tIns="0" bIns="0" wrap="square" rtlCol="0"/>
+          <a:bodyPr wrap="square" lIns="0" tIns="0" rIns="0" bIns="0" rtlCol="0"/>
           <a:lstStyle/>
           <a:p>
             <a:pPr>
@@ -2853,15 +2974,14 @@
               </a:lnSpc>
             </a:pPr>
             <a:r>
-              <a:rPr lang="en-US" sz="2800" noProof="1" b="1">
+              <a:rPr lang="en-US" sz="2800" b="1" noProof="1">
                 <a:solidFill>
                   <a:srgbClr val="172526"/>
                 </a:solidFill>
                 <a:latin typeface="Georgia"/>
                 <a:ea typeface="Georgia"/>
               </a:rPr>
-              <a:t>Надёжная модель начинается с производственных данных
-и независимого теста — не с общей точности</a:t>
+              <a:t>Надёжная модель начинается с производственных данных и независимого теста - не с общей точности</a:t>
             </a:r>
             <a:endParaRPr lang="en-US" sz="2800" noProof="1"/>
           </a:p>
@@ -2909,7 +3029,7 @@
           </a:ln>
         </p:spPr>
         <p:txBody>
-          <a:bodyPr lIns="0" rIns="0" tIns="0" bIns="0" wrap="none" rtlCol="0"/>
+          <a:bodyPr wrap="none" lIns="0" tIns="0" rIns="0" bIns="0" rtlCol="0"/>
           <a:lstStyle/>
           <a:p>
             <a:pPr>
@@ -2918,7 +3038,7 @@
               </a:lnSpc>
             </a:pPr>
             <a:r>
-              <a:rPr lang="en-US" sz="1100" noProof="1" b="1" spc="110" kern="0">
+              <a:rPr lang="en-US" sz="1100" b="1" kern="0" spc="110" noProof="1">
                 <a:solidFill>
                   <a:srgbClr val="0B5D5E"/>
                 </a:solidFill>
@@ -2951,7 +3071,7 @@
           </a:ln>
         </p:spPr>
         <p:txBody>
-          <a:bodyPr lIns="0" rIns="0" tIns="0" bIns="0" wrap="none" rtlCol="0"/>
+          <a:bodyPr wrap="none" lIns="0" tIns="0" rIns="0" bIns="0" rtlCol="0"/>
           <a:lstStyle/>
           <a:p>
             <a:pPr>
@@ -2960,7 +3080,7 @@
               </a:lnSpc>
             </a:pPr>
             <a:r>
-              <a:rPr lang="en-US" sz="2500" noProof="1" b="1">
+              <a:rPr lang="en-US" sz="2500" b="1" noProof="1">
                 <a:solidFill>
                   <a:srgbClr val="083F40"/>
                 </a:solidFill>
@@ -2993,7 +3113,7 @@
           </a:ln>
         </p:spPr>
         <p:txBody>
-          <a:bodyPr lIns="0" rIns="0" tIns="0" bIns="0" wrap="none" rtlCol="0"/>
+          <a:bodyPr wrap="none" lIns="0" tIns="0" rIns="0" bIns="0" rtlCol="0"/>
           <a:lstStyle/>
           <a:p>
             <a:pPr>
@@ -3035,7 +3155,7 @@
           </a:ln>
         </p:spPr>
         <p:txBody>
-          <a:bodyPr lIns="0" rIns="0" tIns="0" bIns="0" wrap="none" rtlCol="0"/>
+          <a:bodyPr wrap="none" lIns="0" tIns="0" rIns="0" bIns="0" rtlCol="0"/>
           <a:lstStyle/>
           <a:p>
             <a:pPr>
@@ -3044,7 +3164,7 @@
               </a:lnSpc>
             </a:pPr>
             <a:r>
-              <a:rPr lang="en-US" sz="2500" noProof="1" b="1">
+              <a:rPr lang="en-US" sz="2500" b="1" noProof="1">
                 <a:solidFill>
                   <a:srgbClr val="083F40"/>
                 </a:solidFill>
@@ -3077,7 +3197,7 @@
           </a:ln>
         </p:spPr>
         <p:txBody>
-          <a:bodyPr lIns="0" rIns="0" tIns="0" bIns="0" wrap="none" rtlCol="0"/>
+          <a:bodyPr wrap="none" lIns="0" tIns="0" rIns="0" bIns="0" rtlCol="0"/>
           <a:lstStyle/>
           <a:p>
             <a:pPr>
@@ -3119,7 +3239,7 @@
           </a:ln>
         </p:spPr>
         <p:txBody>
-          <a:bodyPr lIns="0" rIns="0" tIns="0" bIns="0" wrap="square" rtlCol="0"/>
+          <a:bodyPr wrap="square" lIns="0" tIns="0" rIns="0" bIns="0" rtlCol="0"/>
           <a:lstStyle/>
           <a:p>
             <a:pPr>
@@ -3128,7 +3248,7 @@
               </a:lnSpc>
             </a:pPr>
             <a:r>
-              <a:rPr lang="en-US" sz="1200" noProof="1" b="1">
+              <a:rPr lang="en-US" sz="1200" b="1" noProof="1">
                 <a:solidFill>
                   <a:srgbClr val="172526"/>
                 </a:solidFill>
@@ -3156,7 +3276,7 @@
               </a:lnSpc>
             </a:pPr>
             <a:r>
-              <a:rPr lang="en-US" sz="1200" noProof="1" b="1">
+              <a:rPr lang="en-US" sz="1200" b="1" noProof="1">
                 <a:solidFill>
                   <a:srgbClr val="172526"/>
                 </a:solidFill>
@@ -3184,7 +3304,7 @@
               </a:lnSpc>
             </a:pPr>
             <a:r>
-              <a:rPr lang="en-US" sz="1200" noProof="1" b="1">
+              <a:rPr lang="en-US" sz="1200" b="1" noProof="1">
                 <a:solidFill>
                   <a:srgbClr val="172526"/>
                 </a:solidFill>
@@ -3227,7 +3347,7 @@
           </a:ln>
         </p:spPr>
         <p:txBody>
-          <a:bodyPr lIns="0" rIns="0" tIns="0" bIns="0" wrap="none" rtlCol="0"/>
+          <a:bodyPr wrap="none" lIns="0" tIns="0" rIns="0" bIns="0" rtlCol="0"/>
           <a:lstStyle/>
           <a:p>
             <a:pPr>
@@ -3236,7 +3356,7 @@
               </a:lnSpc>
             </a:pPr>
             <a:r>
-              <a:rPr lang="en-US" sz="1100" noProof="1" b="1" spc="110" kern="0">
+              <a:rPr lang="en-US" sz="1100" b="1" kern="0" spc="110" noProof="1">
                 <a:solidFill>
                   <a:srgbClr val="0B5D5E"/>
                 </a:solidFill>
@@ -3269,7 +3389,7 @@
           </a:ln>
         </p:spPr>
         <p:txBody>
-          <a:bodyPr lIns="0" rIns="0" tIns="0" bIns="0" wrap="square" rtlCol="0"/>
+          <a:bodyPr wrap="square" lIns="0" tIns="0" rIns="0" bIns="0" rtlCol="0"/>
           <a:lstStyle/>
           <a:p>
             <a:pPr>
@@ -3288,7 +3408,7 @@
               <a:t>• двойная разметка не менее </a:t>
             </a:r>
             <a:r>
-              <a:rPr lang="en-US" sz="1200" noProof="1" b="1">
+              <a:rPr lang="en-US" sz="1200" b="1" noProof="1">
                 <a:solidFill>
                   <a:srgbClr val="172526"/>
                 </a:solidFill>
@@ -3344,7 +3464,7 @@
               <a:t>• </a:t>
             </a:r>
             <a:r>
-              <a:rPr lang="en-US" sz="1200" noProof="1" b="1">
+              <a:rPr lang="en-US" sz="1200" b="1" noProof="1">
                 <a:solidFill>
                   <a:srgbClr val="172526"/>
                 </a:solidFill>
@@ -3410,7 +3530,7 @@
           <p:nvPr>
             <p:extLst>
               <p:ext uri="{F5677B7D-0D2A-4D9B-9A5C-6D8D7D0E5A5D}">
-                <pptd:line encoding="base64url">eyJ2aWV3Qm94IjpbMSwzMjRdLCJwb2ludHMiOiIwLDAgMCwzMjQifQ</pptd:line>
+                <pptd:line xmlns:pptd="https://kimi-design.msh.team/pptd/2026" xmlns:mc="http://schemas.openxmlformats.org/markup-compatibility/2006" xmlns:m="http://schemas.openxmlformats.org/officeDocument/2006/math" xmlns:cx="http://schemas.microsoft.com/office/drawing/2014/chartex" xmlns:c="http://schemas.openxmlformats.org/drawingml/2006/chart" xmlns:a14="http://schemas.microsoft.com/office/drawing/2010/main" xmlns="" encoding="base64url">eyJ2aWV3Qm94IjpbMSwzMjRdLCJwb2ludHMiOiIwLDAgMCwzMjQifQ</pptd:line>
               </p:ext>
             </p:extLst>
           </p:nvPr>
@@ -3466,7 +3586,7 @@
           </a:ln>
         </p:spPr>
         <p:txBody>
-          <a:bodyPr lIns="0" rIns="0" tIns="0" bIns="0" wrap="none" rtlCol="0"/>
+          <a:bodyPr wrap="none" lIns="0" tIns="0" rIns="0" bIns="0" rtlCol="0"/>
           <a:lstStyle/>
           <a:p>
             <a:pPr>
@@ -3475,7 +3595,7 @@
               </a:lnSpc>
             </a:pPr>
             <a:r>
-              <a:rPr lang="en-US" sz="1100" noProof="1" b="1" spc="110" kern="0">
+              <a:rPr lang="en-US" sz="1100" b="1" kern="0" spc="110" noProof="1">
                 <a:solidFill>
                   <a:srgbClr val="0B5D5E"/>
                 </a:solidFill>
@@ -3574,7 +3694,7 @@
           </a:ln>
         </p:spPr>
         <p:txBody>
-          <a:bodyPr lIns="0" rIns="0" tIns="0" bIns="0" wrap="none" rtlCol="0" anchor="t"/>
+          <a:bodyPr wrap="none" lIns="0" tIns="0" rIns="0" bIns="0" rtlCol="0" anchor="t"/>
           <a:lstStyle/>
           <a:p>
             <a:pPr algn="ctr">
@@ -3583,7 +3703,7 @@
               </a:lnSpc>
             </a:pPr>
             <a:r>
-              <a:rPr lang="en-US" sz="1200" noProof="1" b="1">
+              <a:rPr lang="en-US" sz="1200" b="1" noProof="1">
                 <a:solidFill>
                   <a:srgbClr val="172526"/>
                 </a:solidFill>
@@ -3616,7 +3736,7 @@
           </a:ln>
         </p:spPr>
         <p:txBody>
-          <a:bodyPr lIns="0" rIns="0" tIns="0" bIns="0" wrap="square" rtlCol="0"/>
+          <a:bodyPr wrap="square" lIns="0" tIns="0" rIns="0" bIns="0" rtlCol="0"/>
           <a:lstStyle/>
           <a:p>
             <a:pPr>
@@ -3625,7 +3745,7 @@
               </a:lnSpc>
             </a:pPr>
             <a:r>
-              <a:rPr lang="en-US" sz="1300" noProof="1" b="1">
+              <a:rPr lang="en-US" sz="1300" b="1" noProof="1">
                 <a:solidFill>
                   <a:srgbClr val="172526"/>
                 </a:solidFill>
@@ -3650,7 +3770,7 @@
                 <a:latin typeface="Arial"/>
                 <a:ea typeface="Arial"/>
               </a:rPr>
-              <a:t>Кадры одного лотка не попадают в разные выборки — иначе результат теста будет завышен.</a:t>
+              <a:t>Кадры одного лотка не попадают в разные выборки - иначе результат теста будет завышен.</a:t>
             </a:r>
             <a:endParaRPr lang="en-US" sz="1300" noProof="1"/>
           </a:p>
@@ -3676,7 +3796,7 @@
           </a:ln>
         </p:spPr>
         <p:txBody>
-          <a:bodyPr lIns="0" rIns="0" tIns="0" bIns="0" wrap="none" rtlCol="0"/>
+          <a:bodyPr wrap="none" lIns="0" tIns="0" rIns="0" bIns="0" rtlCol="0"/>
           <a:lstStyle/>
           <a:p>
             <a:pPr>
@@ -3685,7 +3805,7 @@
               </a:lnSpc>
             </a:pPr>
             <a:r>
-              <a:rPr lang="en-US" sz="1100" noProof="1" b="1" spc="110" kern="0">
+              <a:rPr lang="en-US" sz="1100" b="1" kern="0" spc="110" noProof="1">
                 <a:solidFill>
                   <a:srgbClr val="0B5D5E"/>
                 </a:solidFill>
@@ -3718,7 +3838,7 @@
           </a:ln>
         </p:spPr>
         <p:txBody>
-          <a:bodyPr lIns="0" rIns="0" tIns="0" bIns="0" wrap="square" rtlCol="0"/>
+          <a:bodyPr wrap="square" lIns="0" tIns="0" rIns="0" bIns="0" rtlCol="0"/>
           <a:lstStyle/>
           <a:p>
             <a:pPr>
@@ -3727,7 +3847,7 @@
               </a:lnSpc>
             </a:pPr>
             <a:r>
-              <a:rPr lang="en-US" sz="1200" noProof="1" b="1">
+              <a:rPr lang="en-US" sz="1200" b="1" noProof="1">
                 <a:solidFill>
                   <a:srgbClr val="172526"/>
                 </a:solidFill>
@@ -3828,7 +3948,7 @@
           </a:ln>
         </p:spPr>
         <p:txBody>
-          <a:bodyPr lIns="0" rIns="0" tIns="0" bIns="0" wrap="none" rtlCol="0" anchor="t"/>
+          <a:bodyPr wrap="none" lIns="0" tIns="0" rIns="0" bIns="0" rtlCol="0" anchor="t"/>
           <a:lstStyle/>
           <a:p>
             <a:pPr algn="ctr">
@@ -3837,7 +3957,7 @@
               </a:lnSpc>
             </a:pPr>
             <a:r>
-              <a:rPr lang="en-US" sz="1100" noProof="1" b="1">
+              <a:rPr lang="en-US" sz="1100" b="1" noProof="1">
                 <a:solidFill>
                   <a:srgbClr val="083F40"/>
                 </a:solidFill>
@@ -3870,7 +3990,7 @@
           </a:ln>
         </p:spPr>
         <p:txBody>
-          <a:bodyPr lIns="0" rIns="0" tIns="0" bIns="0" wrap="none" rtlCol="0"/>
+          <a:bodyPr wrap="none" lIns="0" tIns="0" rIns="0" bIns="0" rtlCol="0"/>
           <a:lstStyle/>
           <a:p>
             <a:pPr>
@@ -3912,7 +4032,7 @@
           </a:ln>
         </p:spPr>
         <p:txBody>
-          <a:bodyPr lIns="0" rIns="0" tIns="0" bIns="0" wrap="none" rtlCol="0" anchor="t"/>
+          <a:bodyPr wrap="none" lIns="0" tIns="0" rIns="0" bIns="0" rtlCol="0" anchor="t"/>
           <a:lstStyle/>
           <a:p>
             <a:pPr algn="r">
@@ -3943,13 +4063,14 @@
 </file>
 
 <file path=ppt/slides/slide3.xml><?xml version="1.0" encoding="utf-8"?>
-<p:sld xmlns:a="http://schemas.openxmlformats.org/drawingml/2006/main" xmlns:a14="http://schemas.microsoft.com/office/drawing/2010/main" xmlns:c="http://schemas.openxmlformats.org/drawingml/2006/chart" xmlns:cx="http://schemas.microsoft.com/office/drawing/2014/chartex" xmlns:m="http://schemas.openxmlformats.org/officeDocument/2006/math" xmlns:mc="http://schemas.openxmlformats.org/markup-compatibility/2006" xmlns:pptd="https://kimi-design.msh.team/pptd/2026" xmlns:r="http://schemas.openxmlformats.org/officeDocument/2006/relationships" xmlns:p="http://schemas.openxmlformats.org/presentationml/2006/main">
+<p:sld xmlns:a="http://schemas.openxmlformats.org/drawingml/2006/main" xmlns:r="http://schemas.openxmlformats.org/officeDocument/2006/relationships" xmlns:p="http://schemas.openxmlformats.org/presentationml/2006/main">
   <p:cSld>
     <p:bg>
       <p:bgPr>
         <a:solidFill>
           <a:srgbClr val="FFFFFF"/>
         </a:solidFill>
+        <a:effectLst/>
       </p:bgPr>
     </p:bg>
     <p:spTree>
@@ -3986,7 +4107,7 @@
           </a:ln>
         </p:spPr>
         <p:txBody>
-          <a:bodyPr lIns="0" rIns="0" tIns="0" bIns="0" wrap="none" rtlCol="0"/>
+          <a:bodyPr wrap="none" lIns="0" tIns="0" rIns="0" bIns="0" rtlCol="0"/>
           <a:lstStyle/>
           <a:p>
             <a:pPr>
@@ -3995,7 +4116,7 @@
               </a:lnSpc>
             </a:pPr>
             <a:r>
-              <a:rPr lang="en-US" sz="1000" noProof="1" b="1" spc="140" kern="0">
+              <a:rPr lang="en-US" sz="1000" b="1" kern="0" spc="140" noProof="1">
                 <a:solidFill>
                   <a:srgbClr val="0B5D5E"/>
                 </a:solidFill>
@@ -4028,7 +4149,7 @@
           </a:ln>
         </p:spPr>
         <p:txBody>
-          <a:bodyPr lIns="0" rIns="0" tIns="0" bIns="0" wrap="square" rtlCol="0"/>
+          <a:bodyPr wrap="square" lIns="0" tIns="0" rIns="0" bIns="0" rtlCol="0"/>
           <a:lstStyle/>
           <a:p>
             <a:pPr>
@@ -4037,17 +4158,16 @@
               </a:lnSpc>
             </a:pPr>
             <a:r>
-              <a:rPr lang="en-US" sz="2800" noProof="1" b="1">
+              <a:rPr lang="en-US" sz="2600" b="1" noProof="1">
                 <a:solidFill>
                   <a:srgbClr val="172526"/>
                 </a:solidFill>
                 <a:latin typeface="Georgia"/>
                 <a:ea typeface="Georgia"/>
               </a:rPr>
-              <a:t>Промышленный запуск — после доказательства качества,
-стабильной отбраковки и эффекта относительно точки А</a:t>
-            </a:r>
-            <a:endParaRPr lang="en-US" sz="2800" noProof="1"/>
+              <a:t>Промышленный запуск - после доказательства качества, стабильной отбраковки и эффектотносительно точки А</a:t>
+            </a:r>
+            <a:endParaRPr lang="en-US" sz="2600" noProof="1"/>
           </a:p>
         </p:txBody>
       </p:sp>
@@ -4093,7 +4213,7 @@
           </a:ln>
         </p:spPr>
         <p:txBody>
-          <a:bodyPr lIns="0" rIns="0" tIns="0" bIns="0" wrap="none" rtlCol="0"/>
+          <a:bodyPr wrap="none" lIns="0" tIns="0" rIns="0" bIns="0" rtlCol="0"/>
           <a:lstStyle/>
           <a:p>
             <a:pPr>
@@ -4102,7 +4222,7 @@
               </a:lnSpc>
             </a:pPr>
             <a:r>
-              <a:rPr lang="en-US" sz="1100" noProof="1" b="1" spc="110" kern="0">
+              <a:rPr lang="en-US" sz="1100" b="1" kern="0" spc="110" noProof="1">
                 <a:solidFill>
                   <a:srgbClr val="0B5D5E"/>
                 </a:solidFill>
@@ -4135,7 +4255,7 @@
           </a:ln>
         </p:spPr>
         <p:txBody>
-          <a:bodyPr lIns="0" rIns="0" tIns="0" bIns="0" wrap="none" rtlCol="0"/>
+          <a:bodyPr wrap="none" lIns="0" tIns="0" rIns="0" bIns="0" rtlCol="0"/>
           <a:lstStyle/>
           <a:p>
             <a:pPr>
@@ -4144,7 +4264,7 @@
               </a:lnSpc>
             </a:pPr>
             <a:r>
-              <a:rPr lang="en-US" sz="1700" noProof="1" b="1">
+              <a:rPr lang="en-US" sz="1700" b="1" noProof="1">
                 <a:solidFill>
                   <a:srgbClr val="172526"/>
                 </a:solidFill>
@@ -4177,7 +4297,7 @@
           </a:ln>
         </p:spPr>
         <p:txBody>
-          <a:bodyPr lIns="0" rIns="0" tIns="0" bIns="0" wrap="square" rtlCol="0"/>
+          <a:bodyPr wrap="square" lIns="0" tIns="0" rIns="0" bIns="0" rtlCol="0"/>
           <a:lstStyle/>
           <a:p>
             <a:pPr>
@@ -4219,7 +4339,7 @@
           </a:ln>
         </p:spPr>
         <p:txBody>
-          <a:bodyPr lIns="0" rIns="0" tIns="0" bIns="0" wrap="square" rtlCol="0"/>
+          <a:bodyPr wrap="square" lIns="0" tIns="0" rIns="0" bIns="0" rtlCol="0"/>
           <a:lstStyle/>
           <a:p>
             <a:pPr>
@@ -4228,7 +4348,7 @@
               </a:lnSpc>
             </a:pPr>
             <a:r>
-              <a:rPr lang="en-US" sz="1300" noProof="1" b="1">
+              <a:rPr lang="en-US" sz="1300" b="1" noProof="1">
                 <a:solidFill>
                   <a:srgbClr val="172526"/>
                 </a:solidFill>
@@ -4256,7 +4376,7 @@
               </a:lnSpc>
             </a:pPr>
             <a:r>
-              <a:rPr lang="en-US" sz="1300" noProof="1" b="1">
+              <a:rPr lang="en-US" sz="1300" b="1" noProof="1">
                 <a:solidFill>
                   <a:srgbClr val="172526"/>
                 </a:solidFill>
@@ -4284,7 +4404,7 @@
               </a:lnSpc>
             </a:pPr>
             <a:r>
-              <a:rPr lang="en-US" sz="1300" noProof="1" b="1">
+              <a:rPr lang="en-US" sz="1300" b="1" noProof="1">
                 <a:solidFill>
                   <a:srgbClr val="172526"/>
                 </a:solidFill>
@@ -4327,7 +4447,7 @@
           </a:ln>
         </p:spPr>
         <p:txBody>
-          <a:bodyPr lIns="0" rIns="0" tIns="0" bIns="0" wrap="square" rtlCol="0"/>
+          <a:bodyPr wrap="square" lIns="0" tIns="0" rIns="0" bIns="0" rtlCol="0"/>
           <a:lstStyle/>
           <a:p>
             <a:pPr>
@@ -4336,7 +4456,7 @@
               </a:lnSpc>
             </a:pPr>
             <a:r>
-              <a:rPr lang="en-US" sz="1200" noProof="1" b="1">
+              <a:rPr lang="en-US" sz="1200" b="1" noProof="1">
                 <a:solidFill>
                   <a:srgbClr val="172526"/>
                 </a:solidFill>
@@ -4353,7 +4473,7 @@
                 <a:latin typeface="Arial"/>
                 <a:ea typeface="Arial"/>
               </a:rPr>
-              <a:t> — без управления толкателем.</a:t>
+              <a:t> - без управления толкателем.</a:t>
             </a:r>
             <a:endParaRPr lang="en-US" sz="1200" noProof="1"/>
           </a:p>
@@ -4397,7 +4517,7 @@
           </a:ln>
         </p:spPr>
         <p:txBody>
-          <a:bodyPr lIns="0" rIns="0" tIns="0" bIns="0" wrap="none" rtlCol="0"/>
+          <a:bodyPr wrap="none" lIns="0" tIns="0" rIns="0" bIns="0" rtlCol="0"/>
           <a:lstStyle/>
           <a:p>
             <a:pPr>
@@ -4406,7 +4526,7 @@
               </a:lnSpc>
             </a:pPr>
             <a:r>
-              <a:rPr lang="en-US" sz="1000" noProof="1" b="1" spc="110" kern="0">
+              <a:rPr lang="en-US" sz="1000" b="1" kern="0" spc="110" noProof="1">
                 <a:solidFill>
                   <a:srgbClr val="657475"/>
                 </a:solidFill>
@@ -4439,7 +4559,7 @@
           </a:ln>
         </p:spPr>
         <p:txBody>
-          <a:bodyPr lIns="0" rIns="0" tIns="0" bIns="0" wrap="square" rtlCol="0"/>
+          <a:bodyPr wrap="square" lIns="0" tIns="0" rIns="0" bIns="0" rtlCol="0"/>
           <a:lstStyle/>
           <a:p>
             <a:pPr>
@@ -4448,7 +4568,7 @@
               </a:lnSpc>
             </a:pPr>
             <a:r>
-              <a:rPr lang="en-US" sz="1200" noProof="1" b="1">
+              <a:rPr lang="en-US" sz="1200" b="1" noProof="1">
                 <a:solidFill>
                   <a:srgbClr val="172526"/>
                 </a:solidFill>
@@ -4466,7 +4586,7 @@
               </a:lnSpc>
             </a:pPr>
             <a:r>
-              <a:rPr lang="en-US" sz="1200" noProof="1" b="1">
+              <a:rPr lang="en-US" sz="1200" b="1" noProof="1">
                 <a:solidFill>
                   <a:srgbClr val="172526"/>
                 </a:solidFill>
@@ -4486,7 +4606,7 @@
           <p:nvPr>
             <p:extLst>
               <p:ext uri="{F5677B7D-0D2A-4D9B-9A5C-6D8D7D0E5A5D}">
-                <pptd:line encoding="base64url">eyJ2aWV3Qm94IjpbMSwzNTRdLCJwb2ludHMiOiIwLDAgMCwzNTQifQ</pptd:line>
+                <pptd:line xmlns:pptd="https://kimi-design.msh.team/pptd/2026" xmlns:mc="http://schemas.openxmlformats.org/markup-compatibility/2006" xmlns:m="http://schemas.openxmlformats.org/officeDocument/2006/math" xmlns:cx="http://schemas.microsoft.com/office/drawing/2014/chartex" xmlns:c="http://schemas.openxmlformats.org/drawingml/2006/chart" xmlns:a14="http://schemas.microsoft.com/office/drawing/2010/main" xmlns="" encoding="base64url">eyJ2aWV3Qm94IjpbMSwzNTRdLCJwb2ludHMiOiIwLDAgMCwzNTQifQ</pptd:line>
               </p:ext>
             </p:extLst>
           </p:nvPr>
@@ -4542,7 +4662,7 @@
           </a:ln>
         </p:spPr>
         <p:txBody>
-          <a:bodyPr lIns="0" rIns="0" tIns="0" bIns="0" wrap="none" rtlCol="0"/>
+          <a:bodyPr wrap="none" lIns="0" tIns="0" rIns="0" bIns="0" rtlCol="0"/>
           <a:lstStyle/>
           <a:p>
             <a:pPr>
@@ -4551,7 +4671,7 @@
               </a:lnSpc>
             </a:pPr>
             <a:r>
-              <a:rPr lang="en-US" sz="1100" noProof="1" b="1" spc="110" kern="0">
+              <a:rPr lang="en-US" sz="1100" b="1" kern="0" spc="110" noProof="1">
                 <a:solidFill>
                   <a:srgbClr val="0B5D5E"/>
                 </a:solidFill>
@@ -4584,7 +4704,7 @@
           </a:ln>
         </p:spPr>
         <p:txBody>
-          <a:bodyPr lIns="0" rIns="0" tIns="0" bIns="0" wrap="square" rtlCol="0"/>
+          <a:bodyPr wrap="square" lIns="0" tIns="0" rIns="0" bIns="0" rtlCol="0"/>
           <a:lstStyle/>
           <a:p>
             <a:pPr>
@@ -4593,7 +4713,7 @@
               </a:lnSpc>
             </a:pPr>
             <a:r>
-              <a:rPr lang="en-US" sz="2200" noProof="1" b="1">
+              <a:rPr lang="en-US" sz="2200" b="1" noProof="1">
                 <a:solidFill>
                   <a:srgbClr val="083F40"/>
                 </a:solidFill>
@@ -4644,7 +4764,7 @@
           </a:ln>
         </p:spPr>
         <p:txBody>
-          <a:bodyPr lIns="0" rIns="0" tIns="0" bIns="0" wrap="square" rtlCol="0"/>
+          <a:bodyPr wrap="square" lIns="0" tIns="0" rIns="0" bIns="0" rtlCol="0"/>
           <a:lstStyle/>
           <a:p>
             <a:pPr>
@@ -4653,7 +4773,7 @@
               </a:lnSpc>
             </a:pPr>
             <a:r>
-              <a:rPr lang="en-US" sz="2200" noProof="1" b="1">
+              <a:rPr lang="en-US" sz="2200" b="1" noProof="1">
                 <a:solidFill>
                   <a:srgbClr val="083F40"/>
                 </a:solidFill>
@@ -4704,7 +4824,7 @@
           </a:ln>
         </p:spPr>
         <p:txBody>
-          <a:bodyPr lIns="0" rIns="0" tIns="0" bIns="0" wrap="square" rtlCol="0"/>
+          <a:bodyPr wrap="square" lIns="0" tIns="0" rIns="0" bIns="0" rtlCol="0"/>
           <a:lstStyle/>
           <a:p>
             <a:pPr>
@@ -4713,7 +4833,7 @@
               </a:lnSpc>
             </a:pPr>
             <a:r>
-              <a:rPr lang="en-US" sz="2200" noProof="1" b="1">
+              <a:rPr lang="en-US" sz="2200" b="1" noProof="1">
                 <a:solidFill>
                   <a:srgbClr val="083F40"/>
                 </a:solidFill>
@@ -4764,7 +4884,7 @@
           </a:ln>
         </p:spPr>
         <p:txBody>
-          <a:bodyPr lIns="0" rIns="0" tIns="0" bIns="0" wrap="square" rtlCol="0"/>
+          <a:bodyPr wrap="square" lIns="0" tIns="0" rIns="0" bIns="0" rtlCol="0"/>
           <a:lstStyle/>
           <a:p>
             <a:pPr>
@@ -4773,7 +4893,7 @@
               </a:lnSpc>
             </a:pPr>
             <a:r>
-              <a:rPr lang="en-US" sz="2200" noProof="1" b="1">
+              <a:rPr lang="en-US" sz="2200" b="1" noProof="1">
                 <a:solidFill>
                   <a:srgbClr val="083F40"/>
                 </a:solidFill>
@@ -4824,7 +4944,7 @@
           </a:ln>
         </p:spPr>
         <p:txBody>
-          <a:bodyPr lIns="0" rIns="0" tIns="0" bIns="0" wrap="square" rtlCol="0"/>
+          <a:bodyPr wrap="square" lIns="0" tIns="0" rIns="0" bIns="0" rtlCol="0"/>
           <a:lstStyle/>
           <a:p>
             <a:pPr>
@@ -4833,7 +4953,7 @@
               </a:lnSpc>
             </a:pPr>
             <a:r>
-              <a:rPr lang="en-US" sz="2200" noProof="1" b="1">
+              <a:rPr lang="en-US" sz="2200" b="1" noProof="1">
                 <a:solidFill>
                   <a:srgbClr val="083F40"/>
                 </a:solidFill>
@@ -4884,7 +5004,7 @@
           </a:ln>
         </p:spPr>
         <p:txBody>
-          <a:bodyPr lIns="0" rIns="0" tIns="0" bIns="0" wrap="square" rtlCol="0"/>
+          <a:bodyPr wrap="square" lIns="0" tIns="0" rIns="0" bIns="0" rtlCol="0"/>
           <a:lstStyle/>
           <a:p>
             <a:pPr>
@@ -4893,7 +5013,7 @@
               </a:lnSpc>
             </a:pPr>
             <a:r>
-              <a:rPr lang="en-US" sz="2200" noProof="1" b="1">
+              <a:rPr lang="en-US" sz="2200" b="1" noProof="1">
                 <a:solidFill>
                   <a:srgbClr val="083F40"/>
                 </a:solidFill>
@@ -4944,7 +5064,7 @@
           </a:ln>
         </p:spPr>
         <p:txBody>
-          <a:bodyPr lIns="0" rIns="0" tIns="0" bIns="0" wrap="none" rtlCol="0"/>
+          <a:bodyPr wrap="none" lIns="0" tIns="0" rIns="0" bIns="0" rtlCol="0"/>
           <a:lstStyle/>
           <a:p>
             <a:pPr>
@@ -4953,7 +5073,7 @@
               </a:lnSpc>
             </a:pPr>
             <a:r>
-              <a:rPr lang="en-US" sz="1000" noProof="1" b="1" spc="110" kern="0">
+              <a:rPr lang="en-US" sz="1000" b="1" kern="0" spc="110" noProof="1">
                 <a:solidFill>
                   <a:srgbClr val="657475"/>
                 </a:solidFill>
@@ -4986,7 +5106,7 @@
           </a:ln>
         </p:spPr>
         <p:txBody>
-          <a:bodyPr lIns="0" rIns="0" tIns="0" bIns="0" wrap="square" rtlCol="0"/>
+          <a:bodyPr wrap="square" lIns="0" tIns="0" rIns="0" bIns="0" rtlCol="0"/>
           <a:lstStyle/>
           <a:p>
             <a:pPr>
@@ -4995,7 +5115,7 @@
               </a:lnSpc>
             </a:pPr>
             <a:r>
-              <a:rPr lang="en-US" sz="1100" noProof="1" b="1">
+              <a:rPr lang="en-US" sz="1100" b="1" noProof="1">
                 <a:solidFill>
                   <a:srgbClr val="172526"/>
                 </a:solidFill>
@@ -5046,7 +5166,7 @@
           </a:ln>
         </p:spPr>
         <p:txBody>
-          <a:bodyPr lIns="0" rIns="0" tIns="0" bIns="0" wrap="square" rtlCol="0"/>
+          <a:bodyPr wrap="square" lIns="0" tIns="0" rIns="0" bIns="0" rtlCol="0"/>
           <a:lstStyle/>
           <a:p>
             <a:pPr>
@@ -5055,7 +5175,7 @@
               </a:lnSpc>
             </a:pPr>
             <a:r>
-              <a:rPr lang="en-US" sz="1100" noProof="1" b="1">
+              <a:rPr lang="en-US" sz="1100" b="1" noProof="1">
                 <a:solidFill>
                   <a:srgbClr val="172526"/>
                 </a:solidFill>
@@ -5106,7 +5226,7 @@
           </a:ln>
         </p:spPr>
         <p:txBody>
-          <a:bodyPr lIns="0" rIns="0" tIns="0" bIns="0" wrap="square" rtlCol="0"/>
+          <a:bodyPr wrap="square" lIns="0" tIns="0" rIns="0" bIns="0" rtlCol="0"/>
           <a:lstStyle/>
           <a:p>
             <a:pPr>
@@ -5115,7 +5235,7 @@
               </a:lnSpc>
             </a:pPr>
             <a:r>
-              <a:rPr lang="en-US" sz="1100" noProof="1" b="1">
+              <a:rPr lang="en-US" sz="1100" b="1" noProof="1">
                 <a:solidFill>
                   <a:srgbClr val="172526"/>
                 </a:solidFill>
@@ -5188,7 +5308,7 @@
           </a:ln>
         </p:spPr>
         <p:txBody>
-          <a:bodyPr lIns="0" rIns="0" tIns="0" bIns="0" wrap="none" rtlCol="0" anchor="t"/>
+          <a:bodyPr wrap="none" lIns="0" tIns="0" rIns="0" bIns="0" rtlCol="0" anchor="t"/>
           <a:lstStyle/>
           <a:p>
             <a:pPr algn="ctr">
@@ -5197,14 +5317,14 @@
               </a:lnSpc>
             </a:pPr>
             <a:r>
-              <a:rPr lang="en-US" sz="1100" noProof="1" b="1">
+              <a:rPr lang="en-US" sz="1100" b="1" noProof="1">
                 <a:solidFill>
                   <a:srgbClr val="FFFFFF"/>
                 </a:solidFill>
                 <a:latin typeface="Arial"/>
                 <a:ea typeface="Arial"/>
               </a:rPr>
-              <a:t>Сравниваем полноту, пропуски и ложные отбраковки — не общую точность</a:t>
+              <a:t>Сравниваем полноту, пропуски и ложные отбраковки - не общую точность</a:t>
             </a:r>
             <a:endParaRPr lang="en-US" sz="1100" noProof="1"/>
           </a:p>
@@ -5230,7 +5350,7 @@
           </a:ln>
         </p:spPr>
         <p:txBody>
-          <a:bodyPr lIns="0" rIns="0" tIns="0" bIns="0" wrap="none" rtlCol="0"/>
+          <a:bodyPr wrap="none" lIns="0" tIns="0" rIns="0" bIns="0" rtlCol="0"/>
           <a:lstStyle/>
           <a:p>
             <a:pPr>
@@ -5272,7 +5392,7 @@
           </a:ln>
         </p:spPr>
         <p:txBody>
-          <a:bodyPr lIns="0" rIns="0" tIns="0" bIns="0" wrap="none" rtlCol="0" anchor="t"/>
+          <a:bodyPr wrap="none" lIns="0" tIns="0" rIns="0" bIns="0" rtlCol="0" anchor="t"/>
           <a:lstStyle/>
           <a:p>
             <a:pPr algn="r">
@@ -5411,12 +5531,7 @@
       </a:bgFillStyleLst>
     </a:fmtScheme>
   </a:themeElements>
+  <a:objectDefaults/>
+  <a:extraClrSchemeLst/>
 </a:theme>
-</file>
-
-<file path=customXml/provenance.xml><?xml version="1.0" encoding="utf-8"?>
-<provenance xmlns="urn:kimi:pptd:provenance">
-  <producer>Kimi Slides/Design</producer>
-  <statement>Built by Kimi Slides/Design with PPTD</statement>
-</provenance>
 </file>